--- a/放課後演技派クラブ.pptx
+++ b/放課後演技派クラブ.pptx
@@ -3660,7 +3660,7 @@
               </a:defRPr>
             </a:pPr>
             <a:r>
-              <a:t>桜ヶ丘インターナショナルスクール（サクラ）── 桜ヶ丘町 / 巨大資本【S2】</a:t>
+              <a:t>桜ヶ丘インターナショナルスクール（サクラ）── 桜ヶ丘町 / 高貴・巨大資本</a:t>
             </a:r>
           </a:p>
           <a:p>
@@ -3679,7 +3679,7 @@
               </a:defRPr>
             </a:pPr>
             <a:r>
-              <a:t>円山町学園（マルヤマ）── 円山町 / クラブ・DJ・情報操作</a:t>
+              <a:t>円山町学園（マルヤマ）── 円山町 / クラブ・ナイトカルチャー【S2】</a:t>
             </a:r>
           </a:p>
           <a:p>
@@ -4398,7 +4398,7 @@
               </a:defRPr>
             </a:pPr>
             <a:r>
-              <a:t>全5校がキャットストリートに集結する大乱戦。カイvs大橋（自由vs管理）、一王vsはる（最強対決）が同時展開。るいはりょうすけとの一騎打ちに勝利。ゆうたとしおんが帰還。日常を取り戻すも、S2の脅威となる「桜ヶ丘」のツヨシとヒトミが静かに動き出す。</a:t>
+              <a:t>全5校がキャットストリートに集結する大乱戦。カイvs大橋（自由vs管理）、一王vsはる（最強対決）が同時展開。るいはりょうすけとの一騎打ちに勝利。ゆうたとしおんが帰還。日常を取り戻すも、S2の脅威となる「円山」のナオ率いるイケメン集団が静かに姿を現す。</a:t>
             </a:r>
           </a:p>
         </p:txBody>
@@ -5124,13 +5124,13 @@
               </a:spcAft>
               <a:defRPr sz="1400" b="1">
                 <a:solidFill>
-                  <a:srgbClr val="8B6914"/>
-                </a:solidFill>
-                <a:latin typeface="Hiragino Kaku Gothic ProN"/>
-              </a:defRPr>
-            </a:pPr>
-            <a:r>
-              <a:t>■ 桜ヶ丘インターナショナルスクール（サクラ）── S2伏線</a:t>
+                  <a:srgbClr val="FF1493"/>
+                </a:solidFill>
+                <a:latin typeface="Hiragino Kaku Gothic ProN"/>
+              </a:defRPr>
+            </a:pPr>
+            <a:r>
+              <a:t>■ 円山町学園（マルヤマ）── S2伏線</a:t>
             </a:r>
           </a:p>
           <a:p>
@@ -5149,7 +5149,7 @@
               </a:defRPr>
             </a:pPr>
             <a:r>
-              <a:t>ツヨシ（リーダー） / ヒトミ（サブリーダー）:</a:t>
+              <a:t>ナオ（リーダー） / リョウ・コウセイ・レン:</a:t>
             </a:r>
           </a:p>
           <a:p>
@@ -5168,7 +5168,7 @@
               </a:defRPr>
             </a:pPr>
             <a:r>
-              <a:t>最終話で登場。法律・資本・制度で渋谷を飲み込む次元の違う脅威。S2メインヴィラン。</a:t>
+              <a:t>渋谷一の美形が率いるイケメン集団。円山町の夜を支配する。S2メインヴィラン。</a:t>
             </a:r>
           </a:p>
         </p:txBody>
@@ -5703,7 +5703,7 @@
               </a:defRPr>
             </a:pPr>
             <a:r>
-              <a:t>（リン/りあ＝渋一 / サナ/せりな＝百実 / サラ＝オクシブ / ヒトミ＝サクラ）</a:t>
+              <a:t>（リン/りあ＝渋一 / サナ/せりな＝百実 / サラ＝オクシブ / ミレイ＝マルヤマ）</a:t>
             </a:r>
           </a:p>
           <a:p>
@@ -5811,7 +5811,7 @@
               </a:defRPr>
             </a:pPr>
             <a:r>
-              <a:t>（ミヤシタ、サクラ、マルヤマ、ドウゲン、コウエン、ミヤマス等）</a:t>
+              <a:t>（ミヤシタ、マルヤマ、ドウゲン、コウエン、ミヤマス等）</a:t>
             </a:r>
           </a:p>
           <a:p>
@@ -5922,7 +5922,7 @@
               </a:defRPr>
             </a:pPr>
             <a:r>
-              <a:t>サクラ ── 第20話（最終話）でシルエット登場</a:t>
+              <a:t>マルヤマ ── 第20話（最終話）でイケメン4人が登場</a:t>
             </a:r>
           </a:p>
           <a:p>
